--- a/lecture_pipelines.pptx
+++ b/lecture_pipelines.pptx
@@ -254,7 +254,7 @@
           <a:p>
             <a:fld id="{1ED7098F-87C7-3046-B8E1-0317C0D8D9C4}" type="datetimeFigureOut">
               <a:rPr lang="en-US" smtClean="0"/>
-              <a:t>3/26/25</a:t>
+              <a:t>4/14/25</a:t>
             </a:fld>
             <a:endParaRPr lang="en-US"/>
           </a:p>
@@ -420,7 +420,7 @@
           <a:p>
             <a:fld id="{A83074A2-D88D-8F43-B619-246CA3905610}" type="datetimeFigureOut">
               <a:rPr lang="en-US" smtClean="0"/>
-              <a:t>3/26/25</a:t>
+              <a:t>4/14/25</a:t>
             </a:fld>
             <a:endParaRPr lang="en-US"/>
           </a:p>
@@ -2515,11 +2515,11 @@
             </a:r>
             <a:r>
               <a:rPr lang="nl-NL" dirty="0"/>
-              <a:t> data (</a:t>
-            </a:r>
-            <a:r>
-              <a:rPr lang="nl-NL" dirty="0" err="1"/>
-              <a:t>include</a:t>
+              <a:t> data. </a:t>
+            </a:r>
+            <a:r>
+              <a:rPr lang="nl-NL" dirty="0" err="1"/>
+              <a:t>Include</a:t>
             </a:r>
             <a:r>
               <a:rPr lang="nl-NL" dirty="0"/>
@@ -2571,7 +2571,7 @@
             </a:r>
             <a:r>
               <a:rPr lang="nl-NL" dirty="0"/>
-              <a:t> source was!).</a:t>
+              <a:t> source was.</a:t>
             </a:r>
           </a:p>
           <a:p>
@@ -2580,48 +2580,52 @@
               <a:buChar char="•"/>
             </a:pPr>
             <a:r>
-              <a:rPr lang="nl-NL" dirty="0"/>
+              <a:rPr lang="nl-NL" b="1" dirty="0"/>
               <a:t>Do </a:t>
             </a:r>
             <a:r>
-              <a:rPr lang="nl-NL" dirty="0" err="1"/>
+              <a:rPr lang="nl-NL" b="1" dirty="0" err="1"/>
               <a:t>not</a:t>
             </a:r>
             <a:r>
-              <a:rPr lang="nl-NL" dirty="0"/>
-              <a:t> </a:t>
-            </a:r>
-            <a:r>
-              <a:rPr lang="nl-NL" dirty="0" err="1"/>
+              <a:rPr lang="nl-NL" b="1" dirty="0"/>
+              <a:t> </a:t>
+            </a:r>
+            <a:r>
+              <a:rPr lang="nl-NL" b="1" dirty="0" err="1"/>
               <a:t>modify</a:t>
             </a:r>
             <a:r>
-              <a:rPr lang="nl-NL" dirty="0"/>
-              <a:t> </a:t>
-            </a:r>
-            <a:r>
-              <a:rPr lang="nl-NL" dirty="0" err="1"/>
+              <a:rPr lang="nl-NL" b="1" dirty="0"/>
+              <a:t> </a:t>
+            </a:r>
+            <a:r>
+              <a:rPr lang="nl-NL" b="1" dirty="0" err="1"/>
               <a:t>the</a:t>
             </a:r>
             <a:r>
-              <a:rPr lang="nl-NL" dirty="0"/>
-              <a:t> </a:t>
-            </a:r>
-            <a:r>
-              <a:rPr lang="nl-NL" dirty="0" err="1"/>
+              <a:rPr lang="nl-NL" b="1" dirty="0"/>
+              <a:t> </a:t>
+            </a:r>
+            <a:r>
+              <a:rPr lang="nl-NL" b="1" dirty="0" err="1"/>
               <a:t>ingested</a:t>
             </a:r>
             <a:r>
-              <a:rPr lang="nl-NL" dirty="0"/>
+              <a:rPr lang="nl-NL" b="1" dirty="0"/>
               <a:t> data </a:t>
             </a:r>
             <a:r>
-              <a:rPr lang="nl-NL" dirty="0" err="1"/>
+              <a:rPr lang="nl-NL" b="1" dirty="0" err="1"/>
               <a:t>itself</a:t>
             </a:r>
             <a:r>
-              <a:rPr lang="nl-NL" dirty="0"/>
-              <a:t> – </a:t>
+              <a:rPr lang="nl-NL" b="1" dirty="0"/>
+              <a:t> </a:t>
+            </a:r>
+            <a:r>
+              <a:rPr lang="nl-NL" dirty="0"/>
+              <a:t>– </a:t>
             </a:r>
             <a:r>
               <a:rPr lang="nl-NL" dirty="0" err="1"/>
@@ -2736,55 +2740,55 @@
               <a:buChar char="•"/>
             </a:pPr>
             <a:r>
-              <a:rPr lang="nl-NL" dirty="0"/>
+              <a:rPr lang="nl-NL" b="1" dirty="0"/>
               <a:t>The </a:t>
             </a:r>
             <a:r>
-              <a:rPr lang="nl-NL" dirty="0" err="1"/>
+              <a:rPr lang="nl-NL" b="1" dirty="0" err="1"/>
               <a:t>entire</a:t>
             </a:r>
             <a:r>
-              <a:rPr lang="nl-NL" dirty="0"/>
-              <a:t> </a:t>
-            </a:r>
-            <a:r>
-              <a:rPr lang="nl-NL" dirty="0" err="1"/>
+              <a:rPr lang="nl-NL" b="1" dirty="0"/>
+              <a:t> </a:t>
+            </a:r>
+            <a:r>
+              <a:rPr lang="nl-NL" b="1" dirty="0" err="1"/>
               <a:t>history</a:t>
             </a:r>
             <a:r>
-              <a:rPr lang="nl-NL" dirty="0"/>
+              <a:rPr lang="nl-NL" b="1" dirty="0"/>
               <a:t> of </a:t>
             </a:r>
             <a:r>
-              <a:rPr lang="nl-NL" dirty="0" err="1"/>
+              <a:rPr lang="nl-NL" b="1" dirty="0" err="1"/>
               <a:t>the</a:t>
             </a:r>
             <a:r>
-              <a:rPr lang="nl-NL" dirty="0"/>
+              <a:rPr lang="nl-NL" b="1" dirty="0"/>
               <a:t> pipeline end product </a:t>
             </a:r>
             <a:r>
-              <a:rPr lang="nl-NL" dirty="0" err="1"/>
+              <a:rPr lang="nl-NL" b="1" dirty="0" err="1"/>
               <a:t>should</a:t>
             </a:r>
             <a:r>
-              <a:rPr lang="nl-NL" dirty="0"/>
-              <a:t> </a:t>
-            </a:r>
-            <a:r>
-              <a:rPr lang="nl-NL" dirty="0" err="1"/>
+              <a:rPr lang="nl-NL" b="1" dirty="0"/>
+              <a:t> </a:t>
+            </a:r>
+            <a:r>
+              <a:rPr lang="nl-NL" b="1" dirty="0" err="1"/>
               <a:t>be</a:t>
             </a:r>
             <a:r>
-              <a:rPr lang="nl-NL" dirty="0"/>
-              <a:t> </a:t>
-            </a:r>
-            <a:r>
-              <a:rPr lang="nl-NL" dirty="0" err="1"/>
+              <a:rPr lang="nl-NL" b="1" dirty="0"/>
+              <a:t> </a:t>
+            </a:r>
+            <a:r>
+              <a:rPr lang="nl-NL" b="1" dirty="0" err="1"/>
               <a:t>traceable</a:t>
             </a:r>
             <a:r>
-              <a:rPr lang="nl-NL" dirty="0"/>
+              <a:rPr lang="nl-NL" b="1" dirty="0"/>
               <a:t>.</a:t>
             </a:r>
           </a:p>
@@ -5174,31 +5178,15 @@
             </a:r>
             <a:r>
               <a:rPr lang="nl-NL" dirty="0" err="1"/>
-              <a:t>the</a:t>
-            </a:r>
-            <a:r>
-              <a:rPr lang="nl-NL" dirty="0"/>
-              <a:t> steps </a:t>
-            </a:r>
-            <a:r>
-              <a:rPr lang="nl-NL" dirty="0" err="1"/>
-              <a:t>that</a:t>
-            </a:r>
-            <a:r>
-              <a:rPr lang="nl-NL" dirty="0"/>
-              <a:t> </a:t>
-            </a:r>
-            <a:r>
-              <a:rPr lang="nl-NL" dirty="0" err="1"/>
-              <a:t>it</a:t>
-            </a:r>
-            <a:r>
-              <a:rPr lang="nl-NL" dirty="0"/>
-              <a:t> is made up of is </a:t>
-            </a:r>
-            <a:r>
-              <a:rPr lang="nl-NL" dirty="0" err="1"/>
-              <a:t>also</a:t>
+              <a:t>individual</a:t>
+            </a:r>
+            <a:r>
+              <a:rPr lang="nl-NL" dirty="0"/>
+              <a:t> step is </a:t>
+            </a:r>
+            <a:r>
+              <a:rPr lang="nl-NL" dirty="0" err="1"/>
+              <a:t>itself</a:t>
             </a:r>
             <a:r>
               <a:rPr lang="nl-NL" dirty="0"/>
@@ -5879,7 +5867,9 @@
         </p:nvSpPr>
         <p:spPr/>
         <p:txBody>
-          <a:bodyPr/>
+          <a:bodyPr>
+            <a:normAutofit lnSpcReduction="10000"/>
+          </a:bodyPr>
           <a:lstStyle/>
           <a:p>
             <a:pPr marL="342900" indent="-342900">
@@ -6155,12 +6145,72 @@
               <a:t> systems. </a:t>
             </a:r>
             <a:r>
-              <a:rPr lang="nl-NL" dirty="0" err="1"/>
-              <a:t>Errors</a:t>
-            </a:r>
-            <a:r>
-              <a:rPr lang="nl-NL" dirty="0"/>
-              <a:t> </a:t>
+              <a:rPr lang="nl-NL" b="1" dirty="0" err="1"/>
+              <a:t>All</a:t>
+            </a:r>
+            <a:r>
+              <a:rPr lang="nl-NL" b="1" dirty="0"/>
+              <a:t> </a:t>
+            </a:r>
+            <a:r>
+              <a:rPr lang="nl-NL" b="1" dirty="0" err="1"/>
+              <a:t>errors</a:t>
+            </a:r>
+            <a:r>
+              <a:rPr lang="nl-NL" b="1" dirty="0"/>
+              <a:t> </a:t>
+            </a:r>
+            <a:r>
+              <a:rPr lang="nl-NL" b="1" dirty="0" err="1"/>
+              <a:t>should</a:t>
+            </a:r>
+            <a:r>
+              <a:rPr lang="nl-NL" b="1" dirty="0"/>
+              <a:t> </a:t>
+            </a:r>
+            <a:r>
+              <a:rPr lang="nl-NL" b="1" dirty="0" err="1"/>
+              <a:t>be</a:t>
+            </a:r>
+            <a:r>
+              <a:rPr lang="nl-NL" b="1" dirty="0"/>
+              <a:t> </a:t>
+            </a:r>
+            <a:r>
+              <a:rPr lang="nl-NL" b="1" dirty="0" err="1"/>
+              <a:t>handled</a:t>
+            </a:r>
+            <a:r>
+              <a:rPr lang="nl-NL" b="1" dirty="0"/>
+              <a:t> </a:t>
+            </a:r>
+            <a:r>
+              <a:rPr lang="nl-NL" dirty="0"/>
+              <a:t>(even </a:t>
+            </a:r>
+            <a:r>
+              <a:rPr lang="nl-NL" dirty="0" err="1"/>
+              <a:t>when</a:t>
+            </a:r>
+            <a:r>
+              <a:rPr lang="nl-NL" dirty="0"/>
+              <a:t> </a:t>
+            </a:r>
+            <a:r>
+              <a:rPr lang="nl-NL" dirty="0" err="1"/>
+              <a:t>the</a:t>
+            </a:r>
+            <a:r>
+              <a:rPr lang="nl-NL" dirty="0"/>
+              <a:t> </a:t>
+            </a:r>
+            <a:r>
+              <a:rPr lang="nl-NL" dirty="0" err="1"/>
+              <a:t>only</a:t>
+            </a:r>
+            <a:r>
+              <a:rPr lang="nl-NL" dirty="0"/>
+              <a:t> “handling” </a:t>
             </a:r>
             <a:r>
               <a:rPr lang="nl-NL" dirty="0" err="1"/>
@@ -6180,11 +6230,75 @@
             </a:r>
             <a:r>
               <a:rPr lang="nl-NL" dirty="0" err="1"/>
-              <a:t>occur</a:t>
-            </a:r>
-            <a:r>
-              <a:rPr lang="nl-NL" dirty="0"/>
-              <a:t> </a:t>
+              <a:t>be</a:t>
+            </a:r>
+            <a:r>
+              <a:rPr lang="nl-NL" dirty="0"/>
+              <a:t> </a:t>
+            </a:r>
+            <a:r>
+              <a:rPr lang="nl-NL" dirty="0" err="1"/>
+              <a:t>done</a:t>
+            </a:r>
+            <a:r>
+              <a:rPr lang="nl-NL" dirty="0"/>
+              <a:t> is </a:t>
+            </a:r>
+            <a:r>
+              <a:rPr lang="nl-NL" dirty="0" err="1"/>
+              <a:t>reporting</a:t>
+            </a:r>
+            <a:r>
+              <a:rPr lang="nl-NL" dirty="0"/>
+              <a:t> </a:t>
+            </a:r>
+            <a:r>
+              <a:rPr lang="nl-NL" dirty="0" err="1"/>
+              <a:t>it</a:t>
+            </a:r>
+            <a:r>
+              <a:rPr lang="nl-NL" dirty="0"/>
+              <a:t>). </a:t>
+            </a:r>
+            <a:r>
+              <a:rPr lang="nl-NL" dirty="0" err="1"/>
+              <a:t>When</a:t>
+            </a:r>
+            <a:r>
+              <a:rPr lang="nl-NL" dirty="0"/>
+              <a:t> </a:t>
+            </a:r>
+            <a:r>
+              <a:rPr lang="nl-NL" dirty="0" err="1"/>
+              <a:t>errors</a:t>
+            </a:r>
+            <a:r>
+              <a:rPr lang="nl-NL" dirty="0"/>
+              <a:t> are </a:t>
+            </a:r>
+            <a:r>
+              <a:rPr lang="nl-NL" dirty="0" err="1"/>
+              <a:t>handled</a:t>
+            </a:r>
+            <a:r>
+              <a:rPr lang="nl-NL" dirty="0"/>
+              <a:t>, </a:t>
+            </a:r>
+            <a:r>
+              <a:rPr lang="nl-NL" dirty="0" err="1"/>
+              <a:t>that</a:t>
+            </a:r>
+            <a:r>
+              <a:rPr lang="nl-NL" dirty="0"/>
+              <a:t>, </a:t>
+            </a:r>
+            <a:r>
+              <a:rPr lang="nl-NL" dirty="0" err="1"/>
+              <a:t>too</a:t>
+            </a:r>
+            <a:r>
+              <a:rPr lang="nl-NL" dirty="0"/>
+              <a:t>, </a:t>
             </a:r>
             <a:r>
               <a:rPr lang="nl-NL" dirty="0" err="1"/>
@@ -6197,22 +6311,6 @@
             <a:r>
               <a:rPr lang="nl-NL" dirty="0" err="1"/>
               <a:t>be</a:t>
-            </a:r>
-            <a:r>
-              <a:rPr lang="nl-NL" dirty="0"/>
-              <a:t> </a:t>
-            </a:r>
-            <a:r>
-              <a:rPr lang="nl-NL" dirty="0" err="1"/>
-              <a:t>handled</a:t>
-            </a:r>
-            <a:r>
-              <a:rPr lang="nl-NL" dirty="0"/>
-              <a:t> – </a:t>
-            </a:r>
-            <a:r>
-              <a:rPr lang="nl-NL" dirty="0" err="1"/>
-              <a:t>and</a:t>
             </a:r>
             <a:r>
               <a:rPr lang="nl-NL" dirty="0"/>
@@ -7674,18 +7772,18 @@
 </file>
 
 <file path=customXml/item1.xml><?xml version="1.0" encoding="utf-8"?>
+<p:properties xmlns:p="http://schemas.microsoft.com/office/2006/metadata/properties" xmlns:xsi="http://www.w3.org/2001/XMLSchema-instance">
+  <documentManagement/>
+</p:properties>
+</file>
+
+<file path=customXml/item2.xml><?xml version="1.0" encoding="utf-8"?>
 <?mso-contentType ?>
 <FormTemplates xmlns="http://schemas.microsoft.com/sharepoint/v3/contenttype/forms">
   <Display>DocumentLibraryForm</Display>
   <Edit>DocumentLibraryForm</Edit>
   <New>DocumentLibraryForm</New>
 </FormTemplates>
-</file>
-
-<file path=customXml/item2.xml><?xml version="1.0" encoding="utf-8"?>
-<p:properties xmlns:p="http://schemas.microsoft.com/office/2006/metadata/properties" xmlns:xsi="http://www.w3.org/2001/XMLSchema-instance">
-  <documentManagement/>
-</p:properties>
 </file>
 
 <file path=customXml/item3.xml><?xml version="1.0" encoding="utf-8"?>
@@ -7906,14 +8004,6 @@
 </file>
 
 <file path=customXml/itemProps1.xml><?xml version="1.0" encoding="utf-8"?>
-<ds:datastoreItem xmlns:ds="http://schemas.openxmlformats.org/officeDocument/2006/customXml" ds:itemID="{EE540D17-DFE7-4DA1-AB7C-9204237EF006}">
-  <ds:schemaRefs>
-    <ds:schemaRef ds:uri="http://schemas.microsoft.com/sharepoint/v3/contenttype/forms"/>
-  </ds:schemaRefs>
-</ds:datastoreItem>
-</file>
-
-<file path=customXml/itemProps2.xml><?xml version="1.0" encoding="utf-8"?>
 <ds:datastoreItem xmlns:ds="http://schemas.openxmlformats.org/officeDocument/2006/customXml" ds:itemID="{665827D5-5A12-48FB-BA20-1E7CB9BA5BA1}">
   <ds:schemaRefs>
     <ds:schemaRef ds:uri="http://schemas.microsoft.com/office/2006/documentManagement/types"/>
@@ -7926,6 +8016,14 @@
     <ds:schemaRef ds:uri="53aadeef-871c-4d8b-955c-28f1a1590244"/>
     <ds:schemaRef ds:uri="http://www.w3.org/XML/1998/namespace"/>
     <ds:schemaRef ds:uri="http://purl.org/dc/dcmitype/"/>
+  </ds:schemaRefs>
+</ds:datastoreItem>
+</file>
+
+<file path=customXml/itemProps2.xml><?xml version="1.0" encoding="utf-8"?>
+<ds:datastoreItem xmlns:ds="http://schemas.openxmlformats.org/officeDocument/2006/customXml" ds:itemID="{EE540D17-DFE7-4DA1-AB7C-9204237EF006}">
+  <ds:schemaRefs>
+    <ds:schemaRef ds:uri="http://schemas.microsoft.com/sharepoint/v3/contenttype/forms"/>
   </ds:schemaRefs>
 </ds:datastoreItem>
 </file>

--- a/lecture_pipelines.pptx
+++ b/lecture_pipelines.pptx
@@ -2231,79 +2231,6 @@
           </a:p>
         </p:txBody>
       </p:sp>
-      <p:sp>
-        <p:nvSpPr>
-          <p:cNvPr id="5" name="TextBox 4"/>
-          <p:cNvSpPr txBox="1">
-            <a:spLocks noGrp="1"/>
-          </p:cNvSpPr>
-          <p:nvPr>
-            <p:ph type="body" sz="quarter" idx="11"/>
-          </p:nvPr>
-        </p:nvSpPr>
-        <p:spPr>
-          <a:xfrm>
-            <a:off x="669926" y="5095875"/>
-            <a:ext cx="7839075" cy="276999"/>
-          </a:xfrm>
-          <a:prstGeom prst="rect">
-            <a:avLst/>
-          </a:prstGeom>
-          <a:noFill/>
-        </p:spPr>
-        <p:txBody>
-          <a:bodyPr wrap="square" rtlCol="0">
-            <a:spAutoFit/>
-          </a:bodyPr>
-          <a:lstStyle/>
-          <a:p>
-            <a:pPr>
-              <a:lnSpc>
-                <a:spcPct val="100000"/>
-              </a:lnSpc>
-            </a:pPr>
-            <a:r>
-              <a:rPr lang="en-US" sz="1200" noProof="0" dirty="0" err="1">
-                <a:latin typeface="Arial" panose="020B0604020202020204" pitchFamily="34" charset="0"/>
-                <a:cs typeface="Arial" panose="020B0604020202020204" pitchFamily="34" charset="0"/>
-              </a:rPr>
-              <a:t>Ondertitel</a:t>
-            </a:r>
-            <a:r>
-              <a:rPr lang="en-US" sz="1200" noProof="0" dirty="0">
-                <a:latin typeface="Arial" panose="020B0604020202020204" pitchFamily="34" charset="0"/>
-                <a:cs typeface="Arial" panose="020B0604020202020204" pitchFamily="34" charset="0"/>
-              </a:rPr>
-              <a:t> </a:t>
-            </a:r>
-            <a:r>
-              <a:rPr lang="en-US" sz="1200" noProof="0" dirty="0" err="1">
-                <a:latin typeface="Arial" panose="020B0604020202020204" pitchFamily="34" charset="0"/>
-                <a:cs typeface="Arial" panose="020B0604020202020204" pitchFamily="34" charset="0"/>
-              </a:rPr>
-              <a:t>indien</a:t>
-            </a:r>
-            <a:r>
-              <a:rPr lang="en-US" sz="1200" noProof="0" dirty="0">
-                <a:latin typeface="Arial" panose="020B0604020202020204" pitchFamily="34" charset="0"/>
-                <a:cs typeface="Arial" panose="020B0604020202020204" pitchFamily="34" charset="0"/>
-              </a:rPr>
-              <a:t> </a:t>
-            </a:r>
-            <a:r>
-              <a:rPr lang="en-US" sz="1200" noProof="0" dirty="0" err="1">
-                <a:latin typeface="Arial" panose="020B0604020202020204" pitchFamily="34" charset="0"/>
-                <a:cs typeface="Arial" panose="020B0604020202020204" pitchFamily="34" charset="0"/>
-              </a:rPr>
-              <a:t>nodig</a:t>
-            </a:r>
-            <a:endParaRPr lang="en-US" sz="1200" noProof="0" dirty="0">
-              <a:latin typeface="Arial" panose="020B0604020202020204" pitchFamily="34" charset="0"/>
-              <a:cs typeface="Arial" panose="020B0604020202020204" pitchFamily="34" charset="0"/>
-            </a:endParaRPr>
-          </a:p>
-        </p:txBody>
-      </p:sp>
     </p:spTree>
     <p:extLst>
       <p:ext uri="{BB962C8B-B14F-4D97-AF65-F5344CB8AC3E}">
@@ -6646,7 +6573,15 @@
             </a:r>
             <a:r>
               <a:rPr lang="nl-NL" dirty="0"/>
-              <a:t> me made </a:t>
+              <a:t> </a:t>
+            </a:r>
+            <a:r>
+              <a:rPr lang="nl-NL"/>
+              <a:t>be</a:t>
+            </a:r>
+            <a:r>
+              <a:rPr lang="nl-NL" dirty="0"/>
+              <a:t> made </a:t>
             </a:r>
             <a:r>
               <a:rPr lang="nl-NL" dirty="0" err="1"/>
@@ -7772,21 +7707,6 @@
 </file>
 
 <file path=customXml/item1.xml><?xml version="1.0" encoding="utf-8"?>
-<p:properties xmlns:p="http://schemas.microsoft.com/office/2006/metadata/properties" xmlns:xsi="http://www.w3.org/2001/XMLSchema-instance">
-  <documentManagement/>
-</p:properties>
-</file>
-
-<file path=customXml/item2.xml><?xml version="1.0" encoding="utf-8"?>
-<?mso-contentType ?>
-<FormTemplates xmlns="http://schemas.microsoft.com/sharepoint/v3/contenttype/forms">
-  <Display>DocumentLibraryForm</Display>
-  <Edit>DocumentLibraryForm</Edit>
-  <New>DocumentLibraryForm</New>
-</FormTemplates>
-</file>
-
-<file path=customXml/item3.xml><?xml version="1.0" encoding="utf-8"?>
 <ct:contentTypeSchema xmlns:ct="http://schemas.microsoft.com/office/2006/metadata/contentType" xmlns:ma="http://schemas.microsoft.com/office/2006/metadata/properties/metaAttributes" ct:_="" ma:_="" ma:contentTypeName="Document" ma:contentTypeID="0x010100B2C6846675690041B0AEF76721A33550" ma:contentTypeVersion="12" ma:contentTypeDescription="Een nieuw document maken." ma:contentTypeScope="" ma:versionID="7d80b5b27cb88b7e670b1fbb7cd7de23">
   <xsd:schema xmlns:xsd="http://www.w3.org/2001/XMLSchema" xmlns:xs="http://www.w3.org/2001/XMLSchema" xmlns:p="http://schemas.microsoft.com/office/2006/metadata/properties" xmlns:ns2="6b01692f-8f45-4310-abfd-accd438f234f" xmlns:ns3="41d33a03-4c74-4b4d-8466-39dbc86d9cdb" targetNamespace="http://schemas.microsoft.com/office/2006/metadata/properties" ma:root="true" ma:fieldsID="2679454ac823c4dc22358f51a5683c7b" ns2:_="" ns3:_="">
     <xsd:import namespace="6b01692f-8f45-4310-abfd-accd438f234f"/>
@@ -8003,32 +7923,22 @@
 </ct:contentTypeSchema>
 </file>
 
-<file path=customXml/itemProps1.xml><?xml version="1.0" encoding="utf-8"?>
-<ds:datastoreItem xmlns:ds="http://schemas.openxmlformats.org/officeDocument/2006/customXml" ds:itemID="{665827D5-5A12-48FB-BA20-1E7CB9BA5BA1}">
-  <ds:schemaRefs>
-    <ds:schemaRef ds:uri="http://schemas.microsoft.com/office/2006/documentManagement/types"/>
-    <ds:schemaRef ds:uri="http://schemas.openxmlformats.org/package/2006/metadata/core-properties"/>
-    <ds:schemaRef ds:uri="http://purl.org/dc/elements/1.1/"/>
-    <ds:schemaRef ds:uri="http://schemas.microsoft.com/office/2006/metadata/properties"/>
-    <ds:schemaRef ds:uri="67c6fd78-9e9e-49b0-99f6-392b7eb0c25b"/>
-    <ds:schemaRef ds:uri="http://purl.org/dc/terms/"/>
-    <ds:schemaRef ds:uri="http://schemas.microsoft.com/office/infopath/2007/PartnerControls"/>
-    <ds:schemaRef ds:uri="53aadeef-871c-4d8b-955c-28f1a1590244"/>
-    <ds:schemaRef ds:uri="http://www.w3.org/XML/1998/namespace"/>
-    <ds:schemaRef ds:uri="http://purl.org/dc/dcmitype/"/>
-  </ds:schemaRefs>
-</ds:datastoreItem>
+<file path=customXml/item2.xml><?xml version="1.0" encoding="utf-8"?>
+<?mso-contentType ?>
+<FormTemplates xmlns="http://schemas.microsoft.com/sharepoint/v3/contenttype/forms">
+  <Display>DocumentLibraryForm</Display>
+  <Edit>DocumentLibraryForm</Edit>
+  <New>DocumentLibraryForm</New>
+</FormTemplates>
 </file>
 
-<file path=customXml/itemProps2.xml><?xml version="1.0" encoding="utf-8"?>
-<ds:datastoreItem xmlns:ds="http://schemas.openxmlformats.org/officeDocument/2006/customXml" ds:itemID="{EE540D17-DFE7-4DA1-AB7C-9204237EF006}">
-  <ds:schemaRefs>
-    <ds:schemaRef ds:uri="http://schemas.microsoft.com/sharepoint/v3/contenttype/forms"/>
-  </ds:schemaRefs>
-</ds:datastoreItem>
+<file path=customXml/item3.xml><?xml version="1.0" encoding="utf-8"?>
+<p:properties xmlns:p="http://schemas.microsoft.com/office/2006/metadata/properties" xmlns:xsi="http://www.w3.org/2001/XMLSchema-instance">
+  <documentManagement/>
+</p:properties>
 </file>
 
-<file path=customXml/itemProps3.xml><?xml version="1.0" encoding="utf-8"?>
+<file path=customXml/itemProps1.xml><?xml version="1.0" encoding="utf-8"?>
 <ds:datastoreItem xmlns:ds="http://schemas.openxmlformats.org/officeDocument/2006/customXml" ds:itemID="{E5A48691-3E40-4B9C-9CEF-B13064CE8A2A}">
   <ds:schemaRefs>
     <ds:schemaRef ds:uri="http://schemas.microsoft.com/office/2006/metadata/contentType"/>
@@ -8045,4 +7955,29 @@
     <ds:schemaRef ds:uri="http://schemas.microsoft.com/internal/obd"/>
   </ds:schemaRefs>
 </ds:datastoreItem>
+</file>
+
+<file path=customXml/itemProps2.xml><?xml version="1.0" encoding="utf-8"?>
+<ds:datastoreItem xmlns:ds="http://schemas.openxmlformats.org/officeDocument/2006/customXml" ds:itemID="{EE540D17-DFE7-4DA1-AB7C-9204237EF006}">
+  <ds:schemaRefs>
+    <ds:schemaRef ds:uri="http://schemas.microsoft.com/sharepoint/v3/contenttype/forms"/>
+  </ds:schemaRefs>
+</ds:datastoreItem>
+</file>
+
+<file path=customXml/itemProps3.xml><?xml version="1.0" encoding="utf-8"?>
+<ds:datastoreItem xmlns:ds="http://schemas.openxmlformats.org/officeDocument/2006/customXml" ds:itemID="{665827D5-5A12-48FB-BA20-1E7CB9BA5BA1}">
+  <ds:schemaRefs>
+    <ds:schemaRef ds:uri="http://schemas.microsoft.com/office/2006/documentManagement/types"/>
+    <ds:schemaRef ds:uri="http://schemas.openxmlformats.org/package/2006/metadata/core-properties"/>
+    <ds:schemaRef ds:uri="http://purl.org/dc/elements/1.1/"/>
+    <ds:schemaRef ds:uri="http://schemas.microsoft.com/office/2006/metadata/properties"/>
+    <ds:schemaRef ds:uri="67c6fd78-9e9e-49b0-99f6-392b7eb0c25b"/>
+    <ds:schemaRef ds:uri="http://purl.org/dc/terms/"/>
+    <ds:schemaRef ds:uri="http://schemas.microsoft.com/office/infopath/2007/PartnerControls"/>
+    <ds:schemaRef ds:uri="53aadeef-871c-4d8b-955c-28f1a1590244"/>
+    <ds:schemaRef ds:uri="http://www.w3.org/XML/1998/namespace"/>
+    <ds:schemaRef ds:uri="http://purl.org/dc/dcmitype/"/>
+  </ds:schemaRefs>
+</ds:datastoreItem>
 </file>